--- a/public/fun/pack/pptx/family/가족소개_47_아이와함께_성탄절우체국.pptx
+++ b/public/fun/pack/pptx/family/가족소개_47_아이와함께_성탄절우체국.pptx
@@ -3286,6 +3286,14 @@
 <file path=ppt/slides/slide1.xml><?xml version="1.0" encoding="utf-8"?>
 <p:sld xmlns:a="http://schemas.openxmlformats.org/drawingml/2006/main" xmlns:p="http://schemas.openxmlformats.org/presentationml/2006/main" xmlns:r="http://schemas.openxmlformats.org/officeDocument/2006/relationships">
   <p:cSld>
+    <p:bg>
+      <p:bgPr>
+        <a:solidFill>
+          <a:srgbClr val="D5F6E0"/>
+        </a:solidFill>
+        <a:effectLst/>
+      </p:bgPr>
+    </p:bg>
     <p:spTree>
       <p:nvGrpSpPr>
         <p:cNvPr id="1" name=""/>
@@ -3293,30 +3301,116 @@
         <p:nvPr/>
       </p:nvGrpSpPr>
       <p:grpSpPr/>
-      <p:pic>
-        <p:nvPicPr>
-          <p:cNvPr id="3" name="표지 그림" descr="family-47.jpg"/>
-          <p:cNvPicPr>
-            <a:picLocks noChangeAspect="1"/>
-          </p:cNvPicPr>
-          <p:nvPr/>
-        </p:nvPicPr>
-        <p:blipFill>
-          <a:blip r:embed="rId2"/>
-          <a:stretch>
-            <a:fillRect/>
-          </a:stretch>
-        </p:blipFill>
-        <p:spPr>
-          <a:xfrm>
-            <a:off x="0" y="0"/>
-            <a:ext cx="12191695" cy="6858000"/>
+      <p:sp>
+        <p:nvSpPr>
+          <p:cNvPr id="3" name="사진 자리"/>
+          <p:cNvSpPr/>
+          <p:nvPr/>
+        </p:nvSpPr>
+        <p:spPr>
+          <a:xfrm>
+            <a:off x="7802684" y="0"/>
+            <a:ext cx="4389010" cy="6858000"/>
           </a:xfrm>
           <a:prstGeom prst="rect">
             <a:avLst/>
           </a:prstGeom>
-        </p:spPr>
-      </p:pic>
+          <a:solidFill>
+            <a:srgbClr val="ADEBC2"/>
+          </a:solidFill>
+          <a:ln>
+            <a:noFill/>
+          </a:ln>
+        </p:spPr>
+        <p:txBody>
+          <a:bodyPr rtlCol="0" anchor="ctr" wrap="square" lIns="54864" rIns="54864" tIns="27432" bIns="27432">
+            <a:noAutofit/>
+          </a:bodyPr>
+          <a:lstStyle/>
+          <a:p>
+            <a:pPr algn="ctr">
+              <a:lnSpc>
+                <a:spcPct val="100000"/>
+              </a:lnSpc>
+            </a:pPr>
+            <a:r>
+              <a:rPr sz="1400" b="0" i="0">
+                <a:solidFill>
+                  <a:srgbClr val="274932"/>
+                </a:solidFill>
+              </a:rPr>
+              <a:t>사진을 넣어 주세요</a:t>
+            </a:r>
+          </a:p>
+        </p:txBody>
+      </p:sp>
+      <p:sp>
+        <p:nvSpPr>
+          <p:cNvPr id="4" name="장식"/>
+          <p:cNvSpPr/>
+          <p:nvPr/>
+        </p:nvSpPr>
+        <p:spPr>
+          <a:xfrm>
+            <a:off x="8168435" y="365760"/>
+            <a:ext cx="3657508" cy="6126480"/>
+          </a:xfrm>
+          <a:prstGeom prst="rect">
+            <a:avLst/>
+          </a:prstGeom>
+          <a:noFill/>
+          <a:ln w="9525">
+            <a:solidFill>
+              <a:srgbClr val="26231F"/>
+            </a:solidFill>
+          </a:ln>
+        </p:spPr>
+        <p:txBody>
+          <a:bodyPr rtlCol="0" anchor="ctr"/>
+          <a:lstStyle/>
+          <a:p>
+            <a:pPr algn="ctr"/>
+          </a:p>
+        </p:txBody>
+      </p:sp>
+      <p:sp>
+        <p:nvSpPr>
+          <p:cNvPr id="5" name="라벨"/>
+          <p:cNvSpPr txBox="1"/>
+          <p:nvPr/>
+        </p:nvSpPr>
+        <p:spPr>
+          <a:xfrm>
+            <a:off x="822960" y="2148840"/>
+            <a:ext cx="5608179" cy="274320"/>
+          </a:xfrm>
+          <a:prstGeom prst="rect">
+            <a:avLst/>
+          </a:prstGeom>
+          <a:noFill/>
+        </p:spPr>
+        <p:txBody>
+          <a:bodyPr wrap="square" lIns="54864" rIns="54864" tIns="27432" bIns="27432" anchor="t">
+            <a:noAutofit/>
+          </a:bodyPr>
+          <a:lstStyle/>
+          <a:p>
+            <a:pPr algn="l">
+              <a:lnSpc>
+                <a:spcPct val="115000"/>
+              </a:lnSpc>
+            </a:pPr>
+            <a:r>
+              <a:rPr sz="1000" b="1" i="0" spc="250">
+                <a:solidFill>
+                  <a:srgbClr val="26231F"/>
+                </a:solidFill>
+              </a:rPr>
+              <a:t>FAMILY ALBUM</a:t>
+            </a:r>
+          </a:p>
+        </p:txBody>
+      </p:sp>
       <p:sp>
         <p:nvSpPr>
           <p:cNvPr id="2" name="Title 1"/>
@@ -3329,8 +3423,8 @@
         </p:nvSpPr>
         <p:spPr>
           <a:xfrm>
-            <a:off x="853418" y="2057400"/>
-            <a:ext cx="6095847" cy="1554480"/>
+            <a:off x="822960" y="2606040"/>
+            <a:ext cx="5608179" cy="1188720"/>
           </a:xfrm>
         </p:spPr>
         <p:txBody>
@@ -3345,9 +3439,9 @@
               </a:lnSpc>
             </a:pPr>
             <a:r>
-              <a:rPr sz="3600" b="1" i="0">
-                <a:solidFill>
-                  <a:srgbClr val="183A23"/>
+              <a:rPr sz="4000" b="1" i="0">
+                <a:solidFill>
+                  <a:srgbClr val="26231F"/>
                 </a:solidFill>
               </a:rPr>
               <a:t>우리 가족을 소개합니다</a:t>
@@ -3357,14 +3451,14 @@
       </p:sp>
       <p:sp>
         <p:nvSpPr>
-          <p:cNvPr id="4" name="한 줄 문구"/>
+          <p:cNvPr id="6" name="한 줄 문구"/>
           <p:cNvSpPr txBox="1"/>
           <p:nvPr/>
         </p:nvSpPr>
         <p:spPr>
           <a:xfrm>
-            <a:off x="853418" y="3749039"/>
-            <a:ext cx="6095847" cy="822960"/>
+            <a:off x="822960" y="3886200"/>
+            <a:ext cx="5608179" cy="822960"/>
           </a:xfrm>
           <a:prstGeom prst="rect">
             <a:avLst/>
@@ -3383,26 +3477,26 @@
               </a:lnSpc>
             </a:pPr>
             <a:r>
-              <a:rPr sz="1700" b="0" i="1">
-                <a:solidFill>
-                  <a:srgbClr val="183A23"/>
+              <a:rPr sz="1700" b="0" i="0">
+                <a:solidFill>
+                  <a:srgbClr val="26231F"/>
                 </a:solidFill>
               </a:rPr>
-              <a:t>성탄 카드 부치러 간 우체국 앞</a:t>
-            </a:r>
-          </a:p>
-        </p:txBody>
-      </p:sp>
-      <p:sp>
-        <p:nvSpPr>
-          <p:cNvPr id="5" name="안내 문구"/>
+              <a:t>성탄 카드 부치러 간 골목 앞</a:t>
+            </a:r>
+          </a:p>
+        </p:txBody>
+      </p:sp>
+      <p:sp>
+        <p:nvSpPr>
+          <p:cNvPr id="7" name="안내 문구"/>
           <p:cNvSpPr txBox="1"/>
           <p:nvPr/>
         </p:nvSpPr>
         <p:spPr>
           <a:xfrm>
-            <a:off x="853418" y="4617720"/>
-            <a:ext cx="6095847" cy="914400"/>
+            <a:off x="822960" y="4754880"/>
+            <a:ext cx="5608179" cy="914400"/>
           </a:xfrm>
           <a:prstGeom prst="rect">
             <a:avLst/>
@@ -3423,10 +3517,10 @@
             <a:r>
               <a:rPr sz="1400" b="0" i="0">
                 <a:solidFill>
-                  <a:srgbClr val="666666"/>
+                  <a:srgbClr val="26231F"/>
                 </a:solidFill>
               </a:rPr>
-              <a:t>아이와 함께 · 2027. 00. 00</a:t>
+              <a:t>아이와 함께 · 날짜 입력</a:t>
             </a:r>
           </a:p>
         </p:txBody>
@@ -3465,14 +3559,14 @@
         </p:nvSpPr>
         <p:spPr>
           <a:xfrm>
-            <a:off x="9905695" y="-1463040"/>
-            <a:ext cx="3840480" cy="3840480"/>
-          </a:xfrm>
-          <a:prstGeom prst="ellipse">
+            <a:off x="0" y="6565392"/>
+            <a:ext cx="12191695" cy="292608"/>
+          </a:xfrm>
+          <a:prstGeom prst="rect">
             <a:avLst/>
           </a:prstGeom>
           <a:solidFill>
-            <a:srgbClr val="D2EFDC"/>
+            <a:srgbClr val="ADEBC2"/>
           </a:solidFill>
           <a:ln>
             <a:noFill/>
@@ -3494,14 +3588,81 @@
         </p:nvSpPr>
         <p:spPr>
           <a:xfrm>
-            <a:off x="11094415" y="274320"/>
-            <a:ext cx="411480" cy="411480"/>
-          </a:xfrm>
-          <a:prstGeom prst="ellipse">
+            <a:off x="640080" y="566928"/>
+            <a:ext cx="10911535" cy="10972"/>
+          </a:xfrm>
+          <a:prstGeom prst="rect">
             <a:avLst/>
           </a:prstGeom>
           <a:solidFill>
-            <a:srgbClr val="29653D"/>
+            <a:srgbClr val="26231F"/>
+          </a:solidFill>
+          <a:ln>
+            <a:noFill/>
+          </a:ln>
+        </p:spPr>
+        <p:txBody>
+          <a:bodyPr rtlCol="0" anchor="ctr"/>
+          <a:lstStyle/>
+          <a:p>
+            <a:pPr algn="ctr"/>
+          </a:p>
+        </p:txBody>
+      </p:sp>
+      <p:sp>
+        <p:nvSpPr>
+          <p:cNvPr id="5" name="상단 라벨"/>
+          <p:cNvSpPr txBox="1"/>
+          <p:nvPr/>
+        </p:nvSpPr>
+        <p:spPr>
+          <a:xfrm>
+            <a:off x="640080" y="237744"/>
+            <a:ext cx="5486400" cy="274320"/>
+          </a:xfrm>
+          <a:prstGeom prst="rect">
+            <a:avLst/>
+          </a:prstGeom>
+          <a:noFill/>
+        </p:spPr>
+        <p:txBody>
+          <a:bodyPr wrap="square" lIns="54864" rIns="54864" tIns="27432" bIns="27432" anchor="ctr">
+            <a:noAutofit/>
+          </a:bodyPr>
+          <a:lstStyle/>
+          <a:p>
+            <a:pPr algn="l">
+              <a:lnSpc>
+                <a:spcPct val="115000"/>
+              </a:lnSpc>
+            </a:pPr>
+            <a:r>
+              <a:rPr sz="900" b="1" i="0" spc="250">
+                <a:solidFill>
+                  <a:srgbClr val="26231F"/>
+                </a:solidFill>
+              </a:rPr>
+              <a:t>FAMILY ALBUM</a:t>
+            </a:r>
+          </a:p>
+        </p:txBody>
+      </p:sp>
+      <p:sp>
+        <p:nvSpPr>
+          <p:cNvPr id="6" name="포인트"/>
+          <p:cNvSpPr/>
+          <p:nvPr/>
+        </p:nvSpPr>
+        <p:spPr>
+          <a:xfrm>
+            <a:off x="11204143" y="246888"/>
+            <a:ext cx="237744" cy="237744"/>
+          </a:xfrm>
+          <a:prstGeom prst="mathPlus">
+            <a:avLst/>
+          </a:prstGeom>
+          <a:solidFill>
+            <a:srgbClr val="98E1B1"/>
           </a:solidFill>
           <a:ln>
             <a:noFill/>
@@ -3527,8 +3688,8 @@
         </p:nvSpPr>
         <p:spPr>
           <a:xfrm>
-            <a:off x="640080" y="457200"/>
-            <a:ext cx="9722815" cy="868680"/>
+            <a:off x="640080" y="731520"/>
+            <a:ext cx="10911535" cy="822960"/>
           </a:xfrm>
         </p:spPr>
         <p:txBody>
@@ -3545,7 +3706,7 @@
             <a:r>
               <a:rPr sz="3000" b="1" i="0">
                 <a:solidFill>
-                  <a:srgbClr val="183A23"/>
+                  <a:srgbClr val="26231F"/>
                 </a:solidFill>
               </a:rPr>
               <a:t>가족 구성원</a:t>
@@ -3555,25 +3716,23 @@
       </p:sp>
       <p:sp>
         <p:nvSpPr>
-          <p:cNvPr id="5" name="사진 자리"/>
+          <p:cNvPr id="7" name="사진 자리"/>
           <p:cNvSpPr/>
           <p:nvPr/>
         </p:nvSpPr>
         <p:spPr>
           <a:xfrm>
-            <a:off x="777239" y="1600200"/>
-            <a:ext cx="2282113" cy="2282113"/>
+            <a:off x="821016" y="1783080"/>
+            <a:ext cx="2194560" cy="2194560"/>
           </a:xfrm>
           <a:prstGeom prst="ellipse">
             <a:avLst/>
           </a:prstGeom>
           <a:solidFill>
-            <a:srgbClr val="D2EFDC"/>
+            <a:srgbClr val="D5F6E0"/>
           </a:solidFill>
           <a:ln w="19050">
-            <a:solidFill>
-              <a:srgbClr val="29653D"/>
-            </a:solidFill>
+            <a:noFill/>
             <a:prstDash val="dash"/>
           </a:ln>
         </p:spPr>
@@ -3591,7 +3750,7 @@
             <a:r>
               <a:rPr sz="1200" b="0" i="0">
                 <a:solidFill>
-                  <a:srgbClr val="183A23"/>
+                  <a:srgbClr val="8E8780"/>
                 </a:solidFill>
               </a:rPr>
               <a:t>사진</a:t>
@@ -3601,13 +3760,13 @@
       </p:sp>
       <p:sp>
         <p:nvSpPr>
-          <p:cNvPr id="6" name="TextBox 5"/>
+          <p:cNvPr id="8" name="TextBox 7"/>
           <p:cNvSpPr txBox="1"/>
           <p:nvPr/>
         </p:nvSpPr>
         <p:spPr>
           <a:xfrm>
-            <a:off x="640080" y="3973753"/>
+            <a:off x="640080" y="4069079"/>
             <a:ext cx="2556433" cy="411480"/>
           </a:xfrm>
           <a:prstGeom prst="rect">
@@ -3629,7 +3788,7 @@
             <a:r>
               <a:rPr sz="1600" b="1" i="0">
                 <a:solidFill>
-                  <a:srgbClr val="183A23"/>
+                  <a:srgbClr val="274932"/>
                 </a:solidFill>
               </a:rPr>
               <a:t>아빠</a:t>
@@ -3639,14 +3798,14 @@
       </p:sp>
       <p:sp>
         <p:nvSpPr>
-          <p:cNvPr id="7" name="TextBox 6"/>
+          <p:cNvPr id="9" name="TextBox 8"/>
           <p:cNvSpPr txBox="1"/>
           <p:nvPr/>
         </p:nvSpPr>
         <p:spPr>
           <a:xfrm>
-            <a:off x="731519" y="4430953"/>
-            <a:ext cx="2373553" cy="1969846"/>
+            <a:off x="731519" y="4526279"/>
+            <a:ext cx="2373553" cy="1645919"/>
           </a:xfrm>
           <a:prstGeom prst="rect">
             <a:avLst/>
@@ -3707,25 +3866,23 @@
       </p:sp>
       <p:sp>
         <p:nvSpPr>
-          <p:cNvPr id="8" name="사진 자리"/>
+          <p:cNvPr id="10" name="사진 자리"/>
           <p:cNvSpPr/>
           <p:nvPr/>
         </p:nvSpPr>
         <p:spPr>
           <a:xfrm>
-            <a:off x="3562273" y="1600200"/>
-            <a:ext cx="2282113" cy="2282113"/>
+            <a:off x="3606050" y="1783080"/>
+            <a:ext cx="2194560" cy="2194560"/>
           </a:xfrm>
           <a:prstGeom prst="ellipse">
             <a:avLst/>
           </a:prstGeom>
           <a:solidFill>
-            <a:srgbClr val="D2EFDC"/>
+            <a:srgbClr val="D5F6E0"/>
           </a:solidFill>
           <a:ln w="19050">
-            <a:solidFill>
-              <a:srgbClr val="29653D"/>
-            </a:solidFill>
+            <a:noFill/>
             <a:prstDash val="dash"/>
           </a:ln>
         </p:spPr>
@@ -3743,7 +3900,7 @@
             <a:r>
               <a:rPr sz="1200" b="0" i="0">
                 <a:solidFill>
-                  <a:srgbClr val="183A23"/>
+                  <a:srgbClr val="8E8780"/>
                 </a:solidFill>
               </a:rPr>
               <a:t>사진</a:t>
@@ -3753,13 +3910,13 @@
       </p:sp>
       <p:sp>
         <p:nvSpPr>
-          <p:cNvPr id="9" name="TextBox 8"/>
+          <p:cNvPr id="11" name="TextBox 10"/>
           <p:cNvSpPr txBox="1"/>
           <p:nvPr/>
         </p:nvSpPr>
         <p:spPr>
           <a:xfrm>
-            <a:off x="3425113" y="3973753"/>
+            <a:off x="3425113" y="4069079"/>
             <a:ext cx="2556433" cy="411480"/>
           </a:xfrm>
           <a:prstGeom prst="rect">
@@ -3781,7 +3938,7 @@
             <a:r>
               <a:rPr sz="1600" b="1" i="0">
                 <a:solidFill>
-                  <a:srgbClr val="183A23"/>
+                  <a:srgbClr val="274932"/>
                 </a:solidFill>
               </a:rPr>
               <a:t>엄마</a:t>
@@ -3791,14 +3948,14 @@
       </p:sp>
       <p:sp>
         <p:nvSpPr>
-          <p:cNvPr id="10" name="TextBox 9"/>
+          <p:cNvPr id="12" name="TextBox 11"/>
           <p:cNvSpPr txBox="1"/>
           <p:nvPr/>
         </p:nvSpPr>
         <p:spPr>
           <a:xfrm>
-            <a:off x="3516553" y="4430953"/>
-            <a:ext cx="2373553" cy="1969846"/>
+            <a:off x="3516553" y="4526279"/>
+            <a:ext cx="2373553" cy="1645919"/>
           </a:xfrm>
           <a:prstGeom prst="rect">
             <a:avLst/>
@@ -3859,25 +4016,23 @@
       </p:sp>
       <p:sp>
         <p:nvSpPr>
-          <p:cNvPr id="11" name="사진 자리"/>
+          <p:cNvPr id="13" name="사진 자리"/>
           <p:cNvSpPr/>
           <p:nvPr/>
         </p:nvSpPr>
         <p:spPr>
           <a:xfrm>
-            <a:off x="6347307" y="1600200"/>
-            <a:ext cx="2282113" cy="2282113"/>
+            <a:off x="6391084" y="1783080"/>
+            <a:ext cx="2194560" cy="2194560"/>
           </a:xfrm>
           <a:prstGeom prst="ellipse">
             <a:avLst/>
           </a:prstGeom>
           <a:solidFill>
-            <a:srgbClr val="D2EFDC"/>
+            <a:srgbClr val="D5F6E0"/>
           </a:solidFill>
           <a:ln w="19050">
-            <a:solidFill>
-              <a:srgbClr val="29653D"/>
-            </a:solidFill>
+            <a:noFill/>
             <a:prstDash val="dash"/>
           </a:ln>
         </p:spPr>
@@ -3895,7 +4050,7 @@
             <a:r>
               <a:rPr sz="1200" b="0" i="0">
                 <a:solidFill>
-                  <a:srgbClr val="183A23"/>
+                  <a:srgbClr val="8E8780"/>
                 </a:solidFill>
               </a:rPr>
               <a:t>사진</a:t>
@@ -3905,13 +4060,13 @@
       </p:sp>
       <p:sp>
         <p:nvSpPr>
-          <p:cNvPr id="12" name="TextBox 11"/>
+          <p:cNvPr id="14" name="TextBox 13"/>
           <p:cNvSpPr txBox="1"/>
           <p:nvPr/>
         </p:nvSpPr>
         <p:spPr>
           <a:xfrm>
-            <a:off x="6210147" y="3973753"/>
+            <a:off x="6210147" y="4069079"/>
             <a:ext cx="2556433" cy="411480"/>
           </a:xfrm>
           <a:prstGeom prst="rect">
@@ -3933,7 +4088,7 @@
             <a:r>
               <a:rPr sz="1600" b="1" i="0">
                 <a:solidFill>
-                  <a:srgbClr val="183A23"/>
+                  <a:srgbClr val="274932"/>
                 </a:solidFill>
               </a:rPr>
               <a:t>첫째</a:t>
@@ -3943,14 +4098,14 @@
       </p:sp>
       <p:sp>
         <p:nvSpPr>
-          <p:cNvPr id="13" name="TextBox 12"/>
+          <p:cNvPr id="15" name="TextBox 14"/>
           <p:cNvSpPr txBox="1"/>
           <p:nvPr/>
         </p:nvSpPr>
         <p:spPr>
           <a:xfrm>
-            <a:off x="6301587" y="4430953"/>
-            <a:ext cx="2373553" cy="1969846"/>
+            <a:off x="6301587" y="4526279"/>
+            <a:ext cx="2373553" cy="1645919"/>
           </a:xfrm>
           <a:prstGeom prst="rect">
             <a:avLst/>
@@ -4011,25 +4166,23 @@
       </p:sp>
       <p:sp>
         <p:nvSpPr>
-          <p:cNvPr id="14" name="사진 자리"/>
+          <p:cNvPr id="16" name="사진 자리"/>
           <p:cNvSpPr/>
           <p:nvPr/>
         </p:nvSpPr>
         <p:spPr>
           <a:xfrm>
-            <a:off x="9132341" y="1600200"/>
-            <a:ext cx="2282113" cy="2282113"/>
+            <a:off x="9176118" y="1783080"/>
+            <a:ext cx="2194560" cy="2194560"/>
           </a:xfrm>
           <a:prstGeom prst="ellipse">
             <a:avLst/>
           </a:prstGeom>
           <a:solidFill>
-            <a:srgbClr val="D2EFDC"/>
+            <a:srgbClr val="D5F6E0"/>
           </a:solidFill>
           <a:ln w="19050">
-            <a:solidFill>
-              <a:srgbClr val="29653D"/>
-            </a:solidFill>
+            <a:noFill/>
             <a:prstDash val="dash"/>
           </a:ln>
         </p:spPr>
@@ -4047,7 +4200,7 @@
             <a:r>
               <a:rPr sz="1200" b="0" i="0">
                 <a:solidFill>
-                  <a:srgbClr val="183A23"/>
+                  <a:srgbClr val="8E8780"/>
                 </a:solidFill>
               </a:rPr>
               <a:t>사진</a:t>
@@ -4057,13 +4210,13 @@
       </p:sp>
       <p:sp>
         <p:nvSpPr>
-          <p:cNvPr id="15" name="TextBox 14"/>
+          <p:cNvPr id="17" name="TextBox 16"/>
           <p:cNvSpPr txBox="1"/>
           <p:nvPr/>
         </p:nvSpPr>
         <p:spPr>
           <a:xfrm>
-            <a:off x="8995181" y="3973753"/>
+            <a:off x="8995181" y="4069079"/>
             <a:ext cx="2556433" cy="411480"/>
           </a:xfrm>
           <a:prstGeom prst="rect">
@@ -4085,7 +4238,7 @@
             <a:r>
               <a:rPr sz="1600" b="1" i="0">
                 <a:solidFill>
-                  <a:srgbClr val="183A23"/>
+                  <a:srgbClr val="274932"/>
                 </a:solidFill>
               </a:rPr>
               <a:t>둘째</a:t>
@@ -4095,14 +4248,14 @@
       </p:sp>
       <p:sp>
         <p:nvSpPr>
-          <p:cNvPr id="16" name="TextBox 15"/>
+          <p:cNvPr id="18" name="TextBox 17"/>
           <p:cNvSpPr txBox="1"/>
           <p:nvPr/>
         </p:nvSpPr>
         <p:spPr>
           <a:xfrm>
-            <a:off x="9086621" y="4430953"/>
-            <a:ext cx="2373553" cy="1969846"/>
+            <a:off x="9086621" y="4526279"/>
+            <a:ext cx="2373553" cy="1645919"/>
           </a:xfrm>
           <a:prstGeom prst="rect">
             <a:avLst/>
@@ -4195,14 +4348,14 @@
         </p:nvSpPr>
         <p:spPr>
           <a:xfrm>
-            <a:off x="9905695" y="-1463040"/>
-            <a:ext cx="3840480" cy="3840480"/>
-          </a:xfrm>
-          <a:prstGeom prst="ellipse">
+            <a:off x="0" y="6565392"/>
+            <a:ext cx="12191695" cy="292608"/>
+          </a:xfrm>
+          <a:prstGeom prst="rect">
             <a:avLst/>
           </a:prstGeom>
           <a:solidFill>
-            <a:srgbClr val="D2EFDC"/>
+            <a:srgbClr val="ADEBC2"/>
           </a:solidFill>
           <a:ln>
             <a:noFill/>
@@ -4224,14 +4377,81 @@
         </p:nvSpPr>
         <p:spPr>
           <a:xfrm>
-            <a:off x="11094415" y="274320"/>
-            <a:ext cx="411480" cy="411480"/>
-          </a:xfrm>
-          <a:prstGeom prst="ellipse">
+            <a:off x="640080" y="566928"/>
+            <a:ext cx="10911535" cy="10972"/>
+          </a:xfrm>
+          <a:prstGeom prst="rect">
             <a:avLst/>
           </a:prstGeom>
           <a:solidFill>
-            <a:srgbClr val="29653D"/>
+            <a:srgbClr val="26231F"/>
+          </a:solidFill>
+          <a:ln>
+            <a:noFill/>
+          </a:ln>
+        </p:spPr>
+        <p:txBody>
+          <a:bodyPr rtlCol="0" anchor="ctr"/>
+          <a:lstStyle/>
+          <a:p>
+            <a:pPr algn="ctr"/>
+          </a:p>
+        </p:txBody>
+      </p:sp>
+      <p:sp>
+        <p:nvSpPr>
+          <p:cNvPr id="5" name="상단 라벨"/>
+          <p:cNvSpPr txBox="1"/>
+          <p:nvPr/>
+        </p:nvSpPr>
+        <p:spPr>
+          <a:xfrm>
+            <a:off x="640080" y="237744"/>
+            <a:ext cx="5486400" cy="274320"/>
+          </a:xfrm>
+          <a:prstGeom prst="rect">
+            <a:avLst/>
+          </a:prstGeom>
+          <a:noFill/>
+        </p:spPr>
+        <p:txBody>
+          <a:bodyPr wrap="square" lIns="54864" rIns="54864" tIns="27432" bIns="27432" anchor="ctr">
+            <a:noAutofit/>
+          </a:bodyPr>
+          <a:lstStyle/>
+          <a:p>
+            <a:pPr algn="l">
+              <a:lnSpc>
+                <a:spcPct val="115000"/>
+              </a:lnSpc>
+            </a:pPr>
+            <a:r>
+              <a:rPr sz="900" b="1" i="0" spc="250">
+                <a:solidFill>
+                  <a:srgbClr val="26231F"/>
+                </a:solidFill>
+              </a:rPr>
+              <a:t>FAMILY ALBUM</a:t>
+            </a:r>
+          </a:p>
+        </p:txBody>
+      </p:sp>
+      <p:sp>
+        <p:nvSpPr>
+          <p:cNvPr id="6" name="포인트"/>
+          <p:cNvSpPr/>
+          <p:nvPr/>
+        </p:nvSpPr>
+        <p:spPr>
+          <a:xfrm>
+            <a:off x="11204143" y="246888"/>
+            <a:ext cx="237744" cy="237744"/>
+          </a:xfrm>
+          <a:prstGeom prst="mathPlus">
+            <a:avLst/>
+          </a:prstGeom>
+          <a:solidFill>
+            <a:srgbClr val="98E1B1"/>
           </a:solidFill>
           <a:ln>
             <a:noFill/>
@@ -4257,8 +4477,8 @@
         </p:nvSpPr>
         <p:spPr>
           <a:xfrm>
-            <a:off x="640080" y="457200"/>
-            <a:ext cx="9722815" cy="868680"/>
+            <a:off x="640080" y="731520"/>
+            <a:ext cx="10911535" cy="822960"/>
           </a:xfrm>
         </p:spPr>
         <p:txBody>
@@ -4275,7 +4495,7 @@
             <a:r>
               <a:rPr sz="3000" b="1" i="0">
                 <a:solidFill>
-                  <a:srgbClr val="183A23"/>
+                  <a:srgbClr val="26231F"/>
                 </a:solidFill>
               </a:rPr>
               <a:t>우리 가족 이야기</a:t>
@@ -4285,20 +4505,20 @@
       </p:sp>
       <p:sp>
         <p:nvSpPr>
-          <p:cNvPr id="5" name="타임라인 선"/>
+          <p:cNvPr id="7" name="타임라인 선"/>
           <p:cNvSpPr/>
           <p:nvPr/>
         </p:nvSpPr>
         <p:spPr>
           <a:xfrm>
-            <a:off x="640080" y="3337560"/>
+            <a:off x="640080" y="3520440"/>
             <a:ext cx="10911535" cy="54864"/>
           </a:xfrm>
           <a:prstGeom prst="rect">
             <a:avLst/>
           </a:prstGeom>
           <a:solidFill>
-            <a:srgbClr val="D2EFDC"/>
+            <a:srgbClr val="D5F6E0"/>
           </a:solidFill>
           <a:ln>
             <a:noFill/>
@@ -4314,20 +4534,20 @@
       </p:sp>
       <p:sp>
         <p:nvSpPr>
-          <p:cNvPr id="6" name="때 1"/>
+          <p:cNvPr id="8" name="때 1"/>
           <p:cNvSpPr/>
           <p:nvPr/>
         </p:nvSpPr>
         <p:spPr>
           <a:xfrm>
-            <a:off x="1802853" y="3154680"/>
+            <a:off x="1802853" y="3337560"/>
             <a:ext cx="402336" cy="402336"/>
           </a:xfrm>
           <a:prstGeom prst="ellipse">
             <a:avLst/>
           </a:prstGeom>
           <a:solidFill>
-            <a:srgbClr val="29653D"/>
+            <a:srgbClr val="98E1B1"/>
           </a:solidFill>
           <a:ln w="38100">
             <a:solidFill>
@@ -4345,13 +4565,13 @@
       </p:sp>
       <p:sp>
         <p:nvSpPr>
-          <p:cNvPr id="7" name="TextBox 6"/>
+          <p:cNvPr id="9" name="TextBox 8"/>
           <p:cNvSpPr txBox="1"/>
           <p:nvPr/>
         </p:nvSpPr>
         <p:spPr>
           <a:xfrm>
-            <a:off x="685800" y="2514600"/>
+            <a:off x="685800" y="2697480"/>
             <a:ext cx="2636443" cy="457200"/>
           </a:xfrm>
           <a:prstGeom prst="rect">
@@ -4373,7 +4593,7 @@
             <a:r>
               <a:rPr sz="1600" b="1" i="0">
                 <a:solidFill>
-                  <a:srgbClr val="29653D"/>
+                  <a:srgbClr val="98E1B1"/>
                 </a:solidFill>
               </a:rPr>
               <a:t>가족이 된 날</a:t>
@@ -4383,13 +4603,13 @@
       </p:sp>
       <p:sp>
         <p:nvSpPr>
-          <p:cNvPr id="8" name="TextBox 7"/>
+          <p:cNvPr id="10" name="TextBox 9"/>
           <p:cNvSpPr txBox="1"/>
           <p:nvPr/>
         </p:nvSpPr>
         <p:spPr>
           <a:xfrm>
-            <a:off x="731519" y="3703320"/>
+            <a:off x="731519" y="3886200"/>
             <a:ext cx="2545003" cy="457200"/>
           </a:xfrm>
           <a:prstGeom prst="rect">
@@ -4411,7 +4631,7 @@
             <a:r>
               <a:rPr sz="1800" b="1" i="0">
                 <a:solidFill>
-                  <a:srgbClr val="183A23"/>
+                  <a:srgbClr val="274932"/>
                 </a:solidFill>
               </a:rPr>
               <a:t>우리의 시작</a:t>
@@ -4421,13 +4641,13 @@
       </p:sp>
       <p:sp>
         <p:nvSpPr>
-          <p:cNvPr id="9" name="TextBox 8"/>
+          <p:cNvPr id="11" name="TextBox 10"/>
           <p:cNvSpPr txBox="1"/>
           <p:nvPr/>
         </p:nvSpPr>
         <p:spPr>
           <a:xfrm>
-            <a:off x="731519" y="4206240"/>
+            <a:off x="731519" y="4389120"/>
             <a:ext cx="2545003" cy="1645920"/>
           </a:xfrm>
           <a:prstGeom prst="rect">
@@ -4449,7 +4669,7 @@
             <a:r>
               <a:rPr sz="1500" b="0" i="0">
                 <a:solidFill>
-                  <a:srgbClr val="2B2B2B"/>
+                  <a:srgbClr val="26231F"/>
                 </a:solidFill>
               </a:rPr>
               <a:t>처음 만난 날의 이야기</a:t>
@@ -4459,20 +4679,20 @@
       </p:sp>
       <p:sp>
         <p:nvSpPr>
-          <p:cNvPr id="10" name="때 2"/>
+          <p:cNvPr id="12" name="때 2"/>
           <p:cNvSpPr/>
           <p:nvPr/>
         </p:nvSpPr>
         <p:spPr>
           <a:xfrm>
-            <a:off x="4530737" y="3154680"/>
+            <a:off x="4530737" y="3337560"/>
             <a:ext cx="402336" cy="402336"/>
           </a:xfrm>
           <a:prstGeom prst="ellipse">
             <a:avLst/>
           </a:prstGeom>
           <a:solidFill>
-            <a:srgbClr val="29653D"/>
+            <a:srgbClr val="98E1B1"/>
           </a:solidFill>
           <a:ln w="38100">
             <a:solidFill>
@@ -4490,13 +4710,13 @@
       </p:sp>
       <p:sp>
         <p:nvSpPr>
-          <p:cNvPr id="11" name="TextBox 10"/>
+          <p:cNvPr id="13" name="TextBox 12"/>
           <p:cNvSpPr txBox="1"/>
           <p:nvPr/>
         </p:nvSpPr>
         <p:spPr>
           <a:xfrm>
-            <a:off x="3413683" y="2514600"/>
+            <a:off x="3413683" y="2697480"/>
             <a:ext cx="2636443" cy="457200"/>
           </a:xfrm>
           <a:prstGeom prst="rect">
@@ -4518,7 +4738,7 @@
             <a:r>
               <a:rPr sz="1600" b="1" i="0">
                 <a:solidFill>
-                  <a:srgbClr val="29653D"/>
+                  <a:srgbClr val="98E1B1"/>
                 </a:solidFill>
               </a:rPr>
               <a:t>아이가 태어난 날</a:t>
@@ -4528,13 +4748,13 @@
       </p:sp>
       <p:sp>
         <p:nvSpPr>
-          <p:cNvPr id="12" name="TextBox 11"/>
+          <p:cNvPr id="14" name="TextBox 13"/>
           <p:cNvSpPr txBox="1"/>
           <p:nvPr/>
         </p:nvSpPr>
         <p:spPr>
           <a:xfrm>
-            <a:off x="3459403" y="3703320"/>
+            <a:off x="3459403" y="3886200"/>
             <a:ext cx="2545003" cy="457200"/>
           </a:xfrm>
           <a:prstGeom prst="rect">
@@ -4556,7 +4776,7 @@
             <a:r>
               <a:rPr sz="1800" b="1" i="0">
                 <a:solidFill>
-                  <a:srgbClr val="183A23"/>
+                  <a:srgbClr val="274932"/>
                 </a:solidFill>
               </a:rPr>
               <a:t>새 식구</a:t>
@@ -4566,13 +4786,13 @@
       </p:sp>
       <p:sp>
         <p:nvSpPr>
-          <p:cNvPr id="13" name="TextBox 12"/>
+          <p:cNvPr id="15" name="TextBox 14"/>
           <p:cNvSpPr txBox="1"/>
           <p:nvPr/>
         </p:nvSpPr>
         <p:spPr>
           <a:xfrm>
-            <a:off x="3459403" y="4206240"/>
+            <a:off x="3459403" y="4389120"/>
             <a:ext cx="2545003" cy="1645920"/>
           </a:xfrm>
           <a:prstGeom prst="rect">
@@ -4594,7 +4814,7 @@
             <a:r>
               <a:rPr sz="1500" b="0" i="0">
                 <a:solidFill>
-                  <a:srgbClr val="2B2B2B"/>
+                  <a:srgbClr val="26231F"/>
                 </a:solidFill>
               </a:rPr>
               <a:t>그날의 기억을 적어요</a:t>
@@ -4604,20 +4824,20 @@
       </p:sp>
       <p:sp>
         <p:nvSpPr>
-          <p:cNvPr id="14" name="때 3"/>
+          <p:cNvPr id="16" name="때 3"/>
           <p:cNvSpPr/>
           <p:nvPr/>
         </p:nvSpPr>
         <p:spPr>
           <a:xfrm>
-            <a:off x="7258621" y="3154680"/>
+            <a:off x="7258621" y="3337560"/>
             <a:ext cx="402336" cy="402336"/>
           </a:xfrm>
           <a:prstGeom prst="ellipse">
             <a:avLst/>
           </a:prstGeom>
           <a:solidFill>
-            <a:srgbClr val="29653D"/>
+            <a:srgbClr val="98E1B1"/>
           </a:solidFill>
           <a:ln w="38100">
             <a:solidFill>
@@ -4635,13 +4855,13 @@
       </p:sp>
       <p:sp>
         <p:nvSpPr>
-          <p:cNvPr id="15" name="TextBox 14"/>
+          <p:cNvPr id="17" name="TextBox 16"/>
           <p:cNvSpPr txBox="1"/>
           <p:nvPr/>
         </p:nvSpPr>
         <p:spPr>
           <a:xfrm>
-            <a:off x="6141567" y="2514600"/>
+            <a:off x="6141567" y="2697480"/>
             <a:ext cx="2636443" cy="457200"/>
           </a:xfrm>
           <a:prstGeom prst="rect">
@@ -4663,7 +4883,7 @@
             <a:r>
               <a:rPr sz="1600" b="1" i="0">
                 <a:solidFill>
-                  <a:srgbClr val="29653D"/>
+                  <a:srgbClr val="98E1B1"/>
                 </a:solidFill>
               </a:rPr>
               <a:t>첫 가족 여행</a:t>
@@ -4673,13 +4893,13 @@
       </p:sp>
       <p:sp>
         <p:nvSpPr>
-          <p:cNvPr id="16" name="TextBox 15"/>
+          <p:cNvPr id="18" name="TextBox 17"/>
           <p:cNvSpPr txBox="1"/>
           <p:nvPr/>
         </p:nvSpPr>
         <p:spPr>
           <a:xfrm>
-            <a:off x="6187287" y="3703320"/>
+            <a:off x="6187287" y="3886200"/>
             <a:ext cx="2545003" cy="457200"/>
           </a:xfrm>
           <a:prstGeom prst="rect">
@@ -4701,7 +4921,7 @@
             <a:r>
               <a:rPr sz="1800" b="1" i="0">
                 <a:solidFill>
-                  <a:srgbClr val="183A23"/>
+                  <a:srgbClr val="274932"/>
                 </a:solidFill>
               </a:rPr>
               <a:t>함께 떠난 길</a:t>
@@ -4711,13 +4931,13 @@
       </p:sp>
       <p:sp>
         <p:nvSpPr>
-          <p:cNvPr id="17" name="TextBox 16"/>
+          <p:cNvPr id="19" name="TextBox 18"/>
           <p:cNvSpPr txBox="1"/>
           <p:nvPr/>
         </p:nvSpPr>
         <p:spPr>
           <a:xfrm>
-            <a:off x="6187287" y="4206240"/>
+            <a:off x="6187287" y="4389120"/>
             <a:ext cx="2545003" cy="1645920"/>
           </a:xfrm>
           <a:prstGeom prst="rect">
@@ -4739,7 +4959,7 @@
             <a:r>
               <a:rPr sz="1500" b="0" i="0">
                 <a:solidFill>
-                  <a:srgbClr val="2B2B2B"/>
+                  <a:srgbClr val="26231F"/>
                 </a:solidFill>
               </a:rPr>
               <a:t>가장 웃었던 순간</a:t>
@@ -4749,20 +4969,20 @@
       </p:sp>
       <p:sp>
         <p:nvSpPr>
-          <p:cNvPr id="18" name="때 4"/>
+          <p:cNvPr id="20" name="때 4"/>
           <p:cNvSpPr/>
           <p:nvPr/>
         </p:nvSpPr>
         <p:spPr>
           <a:xfrm>
-            <a:off x="9986505" y="3154680"/>
+            <a:off x="9986505" y="3337560"/>
             <a:ext cx="402336" cy="402336"/>
           </a:xfrm>
           <a:prstGeom prst="ellipse">
             <a:avLst/>
           </a:prstGeom>
           <a:solidFill>
-            <a:srgbClr val="29653D"/>
+            <a:srgbClr val="98E1B1"/>
           </a:solidFill>
           <a:ln w="38100">
             <a:solidFill>
@@ -4780,13 +5000,13 @@
       </p:sp>
       <p:sp>
         <p:nvSpPr>
-          <p:cNvPr id="19" name="TextBox 18"/>
+          <p:cNvPr id="21" name="TextBox 20"/>
           <p:cNvSpPr txBox="1"/>
           <p:nvPr/>
         </p:nvSpPr>
         <p:spPr>
           <a:xfrm>
-            <a:off x="8869451" y="2514600"/>
+            <a:off x="8869451" y="2697480"/>
             <a:ext cx="2636443" cy="457200"/>
           </a:xfrm>
           <a:prstGeom prst="rect">
@@ -4808,7 +5028,7 @@
             <a:r>
               <a:rPr sz="1600" b="1" i="0">
                 <a:solidFill>
-                  <a:srgbClr val="29653D"/>
+                  <a:srgbClr val="98E1B1"/>
                 </a:solidFill>
               </a:rPr>
               <a:t>지금</a:t>
@@ -4818,13 +5038,13 @@
       </p:sp>
       <p:sp>
         <p:nvSpPr>
-          <p:cNvPr id="20" name="TextBox 19"/>
+          <p:cNvPr id="22" name="TextBox 21"/>
           <p:cNvSpPr txBox="1"/>
           <p:nvPr/>
         </p:nvSpPr>
         <p:spPr>
           <a:xfrm>
-            <a:off x="8915171" y="3703320"/>
+            <a:off x="8915171" y="3886200"/>
             <a:ext cx="2545003" cy="457200"/>
           </a:xfrm>
           <a:prstGeom prst="rect">
@@ -4846,7 +5066,7 @@
             <a:r>
               <a:rPr sz="1800" b="1" i="0">
                 <a:solidFill>
-                  <a:srgbClr val="183A23"/>
+                  <a:srgbClr val="274932"/>
                 </a:solidFill>
               </a:rPr>
               <a:t>오늘의 우리</a:t>
@@ -4856,13 +5076,13 @@
       </p:sp>
       <p:sp>
         <p:nvSpPr>
-          <p:cNvPr id="21" name="TextBox 20"/>
+          <p:cNvPr id="23" name="TextBox 22"/>
           <p:cNvSpPr txBox="1"/>
           <p:nvPr/>
         </p:nvSpPr>
         <p:spPr>
           <a:xfrm>
-            <a:off x="8915171" y="4206240"/>
+            <a:off x="8915171" y="4389120"/>
             <a:ext cx="2545003" cy="1645920"/>
           </a:xfrm>
           <a:prstGeom prst="rect">
@@ -4884,7 +5104,7 @@
             <a:r>
               <a:rPr sz="1500" b="0" i="0">
                 <a:solidFill>
-                  <a:srgbClr val="2B2B2B"/>
+                  <a:srgbClr val="26231F"/>
                 </a:solidFill>
               </a:rPr>
               <a:t>요즘 우리 이야기</a:t>
@@ -4926,14 +5146,14 @@
         </p:nvSpPr>
         <p:spPr>
           <a:xfrm>
-            <a:off x="9905695" y="-1463040"/>
-            <a:ext cx="3840480" cy="3840480"/>
-          </a:xfrm>
-          <a:prstGeom prst="ellipse">
+            <a:off x="0" y="6565392"/>
+            <a:ext cx="12191695" cy="292608"/>
+          </a:xfrm>
+          <a:prstGeom prst="rect">
             <a:avLst/>
           </a:prstGeom>
           <a:solidFill>
-            <a:srgbClr val="D2EFDC"/>
+            <a:srgbClr val="ADEBC2"/>
           </a:solidFill>
           <a:ln>
             <a:noFill/>
@@ -4955,14 +5175,81 @@
         </p:nvSpPr>
         <p:spPr>
           <a:xfrm>
-            <a:off x="11094415" y="274320"/>
-            <a:ext cx="411480" cy="411480"/>
-          </a:xfrm>
-          <a:prstGeom prst="ellipse">
+            <a:off x="640080" y="566928"/>
+            <a:ext cx="10911535" cy="10972"/>
+          </a:xfrm>
+          <a:prstGeom prst="rect">
             <a:avLst/>
           </a:prstGeom>
           <a:solidFill>
-            <a:srgbClr val="29653D"/>
+            <a:srgbClr val="26231F"/>
+          </a:solidFill>
+          <a:ln>
+            <a:noFill/>
+          </a:ln>
+        </p:spPr>
+        <p:txBody>
+          <a:bodyPr rtlCol="0" anchor="ctr"/>
+          <a:lstStyle/>
+          <a:p>
+            <a:pPr algn="ctr"/>
+          </a:p>
+        </p:txBody>
+      </p:sp>
+      <p:sp>
+        <p:nvSpPr>
+          <p:cNvPr id="5" name="상단 라벨"/>
+          <p:cNvSpPr txBox="1"/>
+          <p:nvPr/>
+        </p:nvSpPr>
+        <p:spPr>
+          <a:xfrm>
+            <a:off x="640080" y="237744"/>
+            <a:ext cx="5486400" cy="274320"/>
+          </a:xfrm>
+          <a:prstGeom prst="rect">
+            <a:avLst/>
+          </a:prstGeom>
+          <a:noFill/>
+        </p:spPr>
+        <p:txBody>
+          <a:bodyPr wrap="square" lIns="54864" rIns="54864" tIns="27432" bIns="27432" anchor="ctr">
+            <a:noAutofit/>
+          </a:bodyPr>
+          <a:lstStyle/>
+          <a:p>
+            <a:pPr algn="l">
+              <a:lnSpc>
+                <a:spcPct val="115000"/>
+              </a:lnSpc>
+            </a:pPr>
+            <a:r>
+              <a:rPr sz="900" b="1" i="0" spc="250">
+                <a:solidFill>
+                  <a:srgbClr val="26231F"/>
+                </a:solidFill>
+              </a:rPr>
+              <a:t>FAMILY ALBUM</a:t>
+            </a:r>
+          </a:p>
+        </p:txBody>
+      </p:sp>
+      <p:sp>
+        <p:nvSpPr>
+          <p:cNvPr id="6" name="포인트"/>
+          <p:cNvSpPr/>
+          <p:nvPr/>
+        </p:nvSpPr>
+        <p:spPr>
+          <a:xfrm>
+            <a:off x="11204143" y="246888"/>
+            <a:ext cx="237744" cy="237744"/>
+          </a:xfrm>
+          <a:prstGeom prst="mathPlus">
+            <a:avLst/>
+          </a:prstGeom>
+          <a:solidFill>
+            <a:srgbClr val="98E1B1"/>
           </a:solidFill>
           <a:ln>
             <a:noFill/>
@@ -4988,8 +5275,8 @@
         </p:nvSpPr>
         <p:spPr>
           <a:xfrm>
-            <a:off x="640080" y="457200"/>
-            <a:ext cx="9722815" cy="868680"/>
+            <a:off x="640080" y="731520"/>
+            <a:ext cx="10911535" cy="822960"/>
           </a:xfrm>
         </p:spPr>
         <p:txBody>
@@ -5006,7 +5293,7 @@
             <a:r>
               <a:rPr sz="3000" b="1" i="0">
                 <a:solidFill>
-                  <a:srgbClr val="183A23"/>
+                  <a:srgbClr val="26231F"/>
                 </a:solidFill>
               </a:rPr>
               <a:t>우리 가족의 약속</a:t>
@@ -5016,27 +5303,25 @@
       </p:sp>
       <p:sp>
         <p:nvSpPr>
-          <p:cNvPr id="5" name="줄 1"/>
+          <p:cNvPr id="7" name="줄 1"/>
           <p:cNvSpPr/>
           <p:nvPr/>
         </p:nvSpPr>
         <p:spPr>
           <a:xfrm>
-            <a:off x="640080" y="1600200"/>
+            <a:off x="640080" y="1783080"/>
             <a:ext cx="10911535" cy="1005840"/>
           </a:xfrm>
           <a:prstGeom prst="roundRect">
             <a:avLst>
-              <a:gd name="adj" fmla="val 8000"/>
+              <a:gd name="adj" fmla="val 4000"/>
             </a:avLst>
           </a:prstGeom>
           <a:solidFill>
-            <a:srgbClr val="F1F9F3"/>
+            <a:srgbClr val="ECFBF1"/>
           </a:solidFill>
-          <a:ln w="12700">
-            <a:solidFill>
-              <a:srgbClr val="D2EFDC"/>
-            </a:solidFill>
+          <a:ln>
+            <a:noFill/>
           </a:ln>
         </p:spPr>
         <p:txBody>
@@ -5049,20 +5334,49 @@
       </p:sp>
       <p:sp>
         <p:nvSpPr>
-          <p:cNvPr id="6" name="번호 1"/>
+          <p:cNvPr id="8" name="포인트 막대"/>
           <p:cNvSpPr/>
           <p:nvPr/>
         </p:nvSpPr>
         <p:spPr>
           <a:xfrm>
-            <a:off x="822959" y="1874519"/>
+            <a:off x="640080" y="1892807"/>
+            <a:ext cx="54864" cy="786384"/>
+          </a:xfrm>
+          <a:prstGeom prst="rect">
+            <a:avLst/>
+          </a:prstGeom>
+          <a:solidFill>
+            <a:srgbClr val="98E1B1"/>
+          </a:solidFill>
+          <a:ln>
+            <a:noFill/>
+          </a:ln>
+        </p:spPr>
+        <p:txBody>
+          <a:bodyPr rtlCol="0" anchor="ctr"/>
+          <a:lstStyle/>
+          <a:p>
+            <a:pPr algn="ctr"/>
+          </a:p>
+        </p:txBody>
+      </p:sp>
+      <p:sp>
+        <p:nvSpPr>
+          <p:cNvPr id="9" name="번호 1"/>
+          <p:cNvSpPr/>
+          <p:nvPr/>
+        </p:nvSpPr>
+        <p:spPr>
+          <a:xfrm>
+            <a:off x="822959" y="2057400"/>
             <a:ext cx="457200" cy="457200"/>
           </a:xfrm>
           <a:prstGeom prst="ellipse">
             <a:avLst/>
           </a:prstGeom>
           <a:solidFill>
-            <a:srgbClr val="29653D"/>
+            <a:srgbClr val="98E1B1"/>
           </a:solidFill>
           <a:ln>
             <a:noFill/>
@@ -5082,7 +5396,7 @@
             <a:r>
               <a:rPr sz="1600" b="1" i="0">
                 <a:solidFill>
-                  <a:srgbClr val="FFFFFF"/>
+                  <a:srgbClr val="26231F"/>
                 </a:solidFill>
               </a:rPr>
               <a:t>1</a:t>
@@ -5092,13 +5406,13 @@
       </p:sp>
       <p:sp>
         <p:nvSpPr>
-          <p:cNvPr id="7" name="TextBox 6"/>
+          <p:cNvPr id="10" name="TextBox 9"/>
           <p:cNvSpPr txBox="1"/>
           <p:nvPr/>
         </p:nvSpPr>
         <p:spPr>
           <a:xfrm>
-            <a:off x="1508760" y="1645920"/>
+            <a:off x="1508760" y="1828800"/>
             <a:ext cx="2743200" cy="914400"/>
           </a:xfrm>
           <a:prstGeom prst="rect">
@@ -5120,7 +5434,7 @@
             <a:r>
               <a:rPr sz="1800" b="1" i="0">
                 <a:solidFill>
-                  <a:srgbClr val="183A23"/>
+                  <a:srgbClr val="274932"/>
                 </a:solidFill>
               </a:rPr>
               <a:t>약속 1</a:t>
@@ -5130,13 +5444,13 @@
       </p:sp>
       <p:sp>
         <p:nvSpPr>
-          <p:cNvPr id="8" name="TextBox 7"/>
+          <p:cNvPr id="11" name="TextBox 10"/>
           <p:cNvSpPr txBox="1"/>
           <p:nvPr/>
         </p:nvSpPr>
         <p:spPr>
           <a:xfrm>
-            <a:off x="4297680" y="1645920"/>
+            <a:off x="4297680" y="1828800"/>
             <a:ext cx="7071055" cy="914400"/>
           </a:xfrm>
           <a:prstGeom prst="rect">
@@ -5158,7 +5472,7 @@
             <a:r>
               <a:rPr sz="1700" b="0" i="0">
                 <a:solidFill>
-                  <a:srgbClr val="2B2B2B"/>
+                  <a:srgbClr val="26231F"/>
                 </a:solidFill>
               </a:rPr>
               <a:t>밥은 꼭 함께 먹기</a:t>
@@ -5168,27 +5482,25 @@
       </p:sp>
       <p:sp>
         <p:nvSpPr>
-          <p:cNvPr id="9" name="줄 2"/>
+          <p:cNvPr id="12" name="줄 2"/>
           <p:cNvSpPr/>
           <p:nvPr/>
         </p:nvSpPr>
         <p:spPr>
           <a:xfrm>
-            <a:off x="640080" y="2743200"/>
+            <a:off x="640080" y="2926080"/>
             <a:ext cx="10911535" cy="1005840"/>
           </a:xfrm>
           <a:prstGeom prst="roundRect">
             <a:avLst>
-              <a:gd name="adj" fmla="val 8000"/>
+              <a:gd name="adj" fmla="val 4000"/>
             </a:avLst>
           </a:prstGeom>
           <a:solidFill>
-            <a:srgbClr val="F1F9F3"/>
+            <a:srgbClr val="ECFBF1"/>
           </a:solidFill>
-          <a:ln w="12700">
-            <a:solidFill>
-              <a:srgbClr val="D2EFDC"/>
-            </a:solidFill>
+          <a:ln>
+            <a:noFill/>
           </a:ln>
         </p:spPr>
         <p:txBody>
@@ -5201,20 +5513,49 @@
       </p:sp>
       <p:sp>
         <p:nvSpPr>
-          <p:cNvPr id="10" name="번호 2"/>
+          <p:cNvPr id="13" name="포인트 막대"/>
           <p:cNvSpPr/>
           <p:nvPr/>
         </p:nvSpPr>
         <p:spPr>
           <a:xfrm>
-            <a:off x="822959" y="3017520"/>
+            <a:off x="640080" y="3035808"/>
+            <a:ext cx="54864" cy="786384"/>
+          </a:xfrm>
+          <a:prstGeom prst="rect">
+            <a:avLst/>
+          </a:prstGeom>
+          <a:solidFill>
+            <a:srgbClr val="98E1B1"/>
+          </a:solidFill>
+          <a:ln>
+            <a:noFill/>
+          </a:ln>
+        </p:spPr>
+        <p:txBody>
+          <a:bodyPr rtlCol="0" anchor="ctr"/>
+          <a:lstStyle/>
+          <a:p>
+            <a:pPr algn="ctr"/>
+          </a:p>
+        </p:txBody>
+      </p:sp>
+      <p:sp>
+        <p:nvSpPr>
+          <p:cNvPr id="14" name="번호 2"/>
+          <p:cNvSpPr/>
+          <p:nvPr/>
+        </p:nvSpPr>
+        <p:spPr>
+          <a:xfrm>
+            <a:off x="822959" y="3200400"/>
             <a:ext cx="457200" cy="457200"/>
           </a:xfrm>
           <a:prstGeom prst="ellipse">
             <a:avLst/>
           </a:prstGeom>
           <a:solidFill>
-            <a:srgbClr val="29653D"/>
+            <a:srgbClr val="98E1B1"/>
           </a:solidFill>
           <a:ln>
             <a:noFill/>
@@ -5234,7 +5575,7 @@
             <a:r>
               <a:rPr sz="1600" b="1" i="0">
                 <a:solidFill>
-                  <a:srgbClr val="FFFFFF"/>
+                  <a:srgbClr val="26231F"/>
                 </a:solidFill>
               </a:rPr>
               <a:t>2</a:t>
@@ -5244,13 +5585,13 @@
       </p:sp>
       <p:sp>
         <p:nvSpPr>
-          <p:cNvPr id="11" name="TextBox 10"/>
+          <p:cNvPr id="15" name="TextBox 14"/>
           <p:cNvSpPr txBox="1"/>
           <p:nvPr/>
         </p:nvSpPr>
         <p:spPr>
           <a:xfrm>
-            <a:off x="1508760" y="2788920"/>
+            <a:off x="1508760" y="2971800"/>
             <a:ext cx="2743200" cy="914400"/>
           </a:xfrm>
           <a:prstGeom prst="rect">
@@ -5272,7 +5613,7 @@
             <a:r>
               <a:rPr sz="1800" b="1" i="0">
                 <a:solidFill>
-                  <a:srgbClr val="183A23"/>
+                  <a:srgbClr val="274932"/>
                 </a:solidFill>
               </a:rPr>
               <a:t>약속 2</a:t>
@@ -5282,13 +5623,13 @@
       </p:sp>
       <p:sp>
         <p:nvSpPr>
-          <p:cNvPr id="12" name="TextBox 11"/>
+          <p:cNvPr id="16" name="TextBox 15"/>
           <p:cNvSpPr txBox="1"/>
           <p:nvPr/>
         </p:nvSpPr>
         <p:spPr>
           <a:xfrm>
-            <a:off x="4297680" y="2788920"/>
+            <a:off x="4297680" y="2971800"/>
             <a:ext cx="7071055" cy="914400"/>
           </a:xfrm>
           <a:prstGeom prst="rect">
@@ -5310,7 +5651,7 @@
             <a:r>
               <a:rPr sz="1700" b="0" i="0">
                 <a:solidFill>
-                  <a:srgbClr val="2B2B2B"/>
+                  <a:srgbClr val="26231F"/>
                 </a:solidFill>
               </a:rPr>
               <a:t>잠들기 전에 사랑한다고 말하기</a:t>
@@ -5320,27 +5661,25 @@
       </p:sp>
       <p:sp>
         <p:nvSpPr>
-          <p:cNvPr id="13" name="줄 3"/>
+          <p:cNvPr id="17" name="줄 3"/>
           <p:cNvSpPr/>
           <p:nvPr/>
         </p:nvSpPr>
         <p:spPr>
           <a:xfrm>
-            <a:off x="640080" y="3886200"/>
+            <a:off x="640080" y="4069080"/>
             <a:ext cx="10911535" cy="1005840"/>
           </a:xfrm>
           <a:prstGeom prst="roundRect">
             <a:avLst>
-              <a:gd name="adj" fmla="val 8000"/>
+              <a:gd name="adj" fmla="val 4000"/>
             </a:avLst>
           </a:prstGeom>
           <a:solidFill>
-            <a:srgbClr val="F1F9F3"/>
+            <a:srgbClr val="ECFBF1"/>
           </a:solidFill>
-          <a:ln w="12700">
-            <a:solidFill>
-              <a:srgbClr val="D2EFDC"/>
-            </a:solidFill>
+          <a:ln>
+            <a:noFill/>
           </a:ln>
         </p:spPr>
         <p:txBody>
@@ -5353,20 +5692,49 @@
       </p:sp>
       <p:sp>
         <p:nvSpPr>
-          <p:cNvPr id="14" name="번호 3"/>
+          <p:cNvPr id="18" name="포인트 막대"/>
           <p:cNvSpPr/>
           <p:nvPr/>
         </p:nvSpPr>
         <p:spPr>
           <a:xfrm>
-            <a:off x="822959" y="4160520"/>
+            <a:off x="640080" y="4178808"/>
+            <a:ext cx="54864" cy="786384"/>
+          </a:xfrm>
+          <a:prstGeom prst="rect">
+            <a:avLst/>
+          </a:prstGeom>
+          <a:solidFill>
+            <a:srgbClr val="98E1B1"/>
+          </a:solidFill>
+          <a:ln>
+            <a:noFill/>
+          </a:ln>
+        </p:spPr>
+        <p:txBody>
+          <a:bodyPr rtlCol="0" anchor="ctr"/>
+          <a:lstStyle/>
+          <a:p>
+            <a:pPr algn="ctr"/>
+          </a:p>
+        </p:txBody>
+      </p:sp>
+      <p:sp>
+        <p:nvSpPr>
+          <p:cNvPr id="19" name="번호 3"/>
+          <p:cNvSpPr/>
+          <p:nvPr/>
+        </p:nvSpPr>
+        <p:spPr>
+          <a:xfrm>
+            <a:off x="822959" y="4343400"/>
             <a:ext cx="457200" cy="457200"/>
           </a:xfrm>
           <a:prstGeom prst="ellipse">
             <a:avLst/>
           </a:prstGeom>
           <a:solidFill>
-            <a:srgbClr val="29653D"/>
+            <a:srgbClr val="98E1B1"/>
           </a:solidFill>
           <a:ln>
             <a:noFill/>
@@ -5386,7 +5754,7 @@
             <a:r>
               <a:rPr sz="1600" b="1" i="0">
                 <a:solidFill>
-                  <a:srgbClr val="FFFFFF"/>
+                  <a:srgbClr val="26231F"/>
                 </a:solidFill>
               </a:rPr>
               <a:t>3</a:t>
@@ -5396,13 +5764,13 @@
       </p:sp>
       <p:sp>
         <p:nvSpPr>
-          <p:cNvPr id="15" name="TextBox 14"/>
+          <p:cNvPr id="20" name="TextBox 19"/>
           <p:cNvSpPr txBox="1"/>
           <p:nvPr/>
         </p:nvSpPr>
         <p:spPr>
           <a:xfrm>
-            <a:off x="1508760" y="3931920"/>
+            <a:off x="1508760" y="4114800"/>
             <a:ext cx="2743200" cy="914400"/>
           </a:xfrm>
           <a:prstGeom prst="rect">
@@ -5424,7 +5792,7 @@
             <a:r>
               <a:rPr sz="1800" b="1" i="0">
                 <a:solidFill>
-                  <a:srgbClr val="183A23"/>
+                  <a:srgbClr val="274932"/>
                 </a:solidFill>
               </a:rPr>
               <a:t>약속 3</a:t>
@@ -5434,13 +5802,13 @@
       </p:sp>
       <p:sp>
         <p:nvSpPr>
-          <p:cNvPr id="16" name="TextBox 15"/>
+          <p:cNvPr id="21" name="TextBox 20"/>
           <p:cNvSpPr txBox="1"/>
           <p:nvPr/>
         </p:nvSpPr>
         <p:spPr>
           <a:xfrm>
-            <a:off x="4297680" y="3931920"/>
+            <a:off x="4297680" y="4114800"/>
             <a:ext cx="7071055" cy="914400"/>
           </a:xfrm>
           <a:prstGeom prst="rect">
@@ -5462,7 +5830,7 @@
             <a:r>
               <a:rPr sz="1700" b="0" i="0">
                 <a:solidFill>
-                  <a:srgbClr val="2B2B2B"/>
+                  <a:srgbClr val="26231F"/>
                 </a:solidFill>
               </a:rPr>
               <a:t>주말에는 함께 산책하기</a:t>
@@ -5504,14 +5872,14 @@
         </p:nvSpPr>
         <p:spPr>
           <a:xfrm>
-            <a:off x="9905695" y="-1463040"/>
-            <a:ext cx="3840480" cy="3840480"/>
-          </a:xfrm>
-          <a:prstGeom prst="ellipse">
+            <a:off x="0" y="6565392"/>
+            <a:ext cx="12191695" cy="292608"/>
+          </a:xfrm>
+          <a:prstGeom prst="rect">
             <a:avLst/>
           </a:prstGeom>
           <a:solidFill>
-            <a:srgbClr val="D2EFDC"/>
+            <a:srgbClr val="ADEBC2"/>
           </a:solidFill>
           <a:ln>
             <a:noFill/>
@@ -5533,14 +5901,81 @@
         </p:nvSpPr>
         <p:spPr>
           <a:xfrm>
-            <a:off x="11094415" y="274320"/>
-            <a:ext cx="411480" cy="411480"/>
-          </a:xfrm>
-          <a:prstGeom prst="ellipse">
+            <a:off x="640080" y="566928"/>
+            <a:ext cx="10911535" cy="10972"/>
+          </a:xfrm>
+          <a:prstGeom prst="rect">
             <a:avLst/>
           </a:prstGeom>
           <a:solidFill>
-            <a:srgbClr val="29653D"/>
+            <a:srgbClr val="26231F"/>
+          </a:solidFill>
+          <a:ln>
+            <a:noFill/>
+          </a:ln>
+        </p:spPr>
+        <p:txBody>
+          <a:bodyPr rtlCol="0" anchor="ctr"/>
+          <a:lstStyle/>
+          <a:p>
+            <a:pPr algn="ctr"/>
+          </a:p>
+        </p:txBody>
+      </p:sp>
+      <p:sp>
+        <p:nvSpPr>
+          <p:cNvPr id="5" name="상단 라벨"/>
+          <p:cNvSpPr txBox="1"/>
+          <p:nvPr/>
+        </p:nvSpPr>
+        <p:spPr>
+          <a:xfrm>
+            <a:off x="640080" y="237744"/>
+            <a:ext cx="5486400" cy="274320"/>
+          </a:xfrm>
+          <a:prstGeom prst="rect">
+            <a:avLst/>
+          </a:prstGeom>
+          <a:noFill/>
+        </p:spPr>
+        <p:txBody>
+          <a:bodyPr wrap="square" lIns="54864" rIns="54864" tIns="27432" bIns="27432" anchor="ctr">
+            <a:noAutofit/>
+          </a:bodyPr>
+          <a:lstStyle/>
+          <a:p>
+            <a:pPr algn="l">
+              <a:lnSpc>
+                <a:spcPct val="115000"/>
+              </a:lnSpc>
+            </a:pPr>
+            <a:r>
+              <a:rPr sz="900" b="1" i="0" spc="250">
+                <a:solidFill>
+                  <a:srgbClr val="26231F"/>
+                </a:solidFill>
+              </a:rPr>
+              <a:t>FAMILY ALBUM</a:t>
+            </a:r>
+          </a:p>
+        </p:txBody>
+      </p:sp>
+      <p:sp>
+        <p:nvSpPr>
+          <p:cNvPr id="6" name="포인트"/>
+          <p:cNvSpPr/>
+          <p:nvPr/>
+        </p:nvSpPr>
+        <p:spPr>
+          <a:xfrm>
+            <a:off x="11204143" y="246888"/>
+            <a:ext cx="237744" cy="237744"/>
+          </a:xfrm>
+          <a:prstGeom prst="mathPlus">
+            <a:avLst/>
+          </a:prstGeom>
+          <a:solidFill>
+            <a:srgbClr val="98E1B1"/>
           </a:solidFill>
           <a:ln>
             <a:noFill/>
@@ -5566,8 +6001,8 @@
         </p:nvSpPr>
         <p:spPr>
           <a:xfrm>
-            <a:off x="640080" y="457200"/>
-            <a:ext cx="9722815" cy="868680"/>
+            <a:off x="640080" y="731520"/>
+            <a:ext cx="10911535" cy="822960"/>
           </a:xfrm>
         </p:spPr>
         <p:txBody>
@@ -5584,7 +6019,7 @@
             <a:r>
               <a:rPr sz="3000" b="1" i="0">
                 <a:solidFill>
-                  <a:srgbClr val="183A23"/>
+                  <a:srgbClr val="26231F"/>
                 </a:solidFill>
               </a:rPr>
               <a:t>가족 사진</a:t>
@@ -5594,14 +6029,14 @@
       </p:sp>
       <p:sp>
         <p:nvSpPr>
-          <p:cNvPr id="5" name="사진 자리"/>
+          <p:cNvPr id="7" name="사진 자리"/>
           <p:cNvSpPr/>
           <p:nvPr/>
         </p:nvSpPr>
         <p:spPr>
           <a:xfrm>
-            <a:off x="640080" y="1600200"/>
-            <a:ext cx="3515258" cy="2308860"/>
+            <a:off x="640080" y="1783080"/>
+            <a:ext cx="3515258" cy="2103120"/>
           </a:xfrm>
           <a:prstGeom prst="roundRect">
             <a:avLst>
@@ -5609,12 +6044,10 @@
             </a:avLst>
           </a:prstGeom>
           <a:solidFill>
-            <a:srgbClr val="D2EFDC"/>
+            <a:srgbClr val="D5F6E0"/>
           </a:solidFill>
           <a:ln w="19050">
-            <a:solidFill>
-              <a:srgbClr val="29653D"/>
-            </a:solidFill>
+            <a:noFill/>
             <a:prstDash val="dash"/>
           </a:ln>
         </p:spPr>
@@ -5632,7 +6065,7 @@
             <a:r>
               <a:rPr sz="1200" b="0" i="0">
                 <a:solidFill>
-                  <a:srgbClr val="183A23"/>
+                  <a:srgbClr val="8E8780"/>
                 </a:solidFill>
               </a:rPr>
               <a:t>사진 1</a:t>
@@ -5642,14 +6075,14 @@
       </p:sp>
       <p:sp>
         <p:nvSpPr>
-          <p:cNvPr id="6" name="사진 자리"/>
+          <p:cNvPr id="8" name="사진 자리"/>
           <p:cNvSpPr/>
           <p:nvPr/>
         </p:nvSpPr>
         <p:spPr>
           <a:xfrm>
-            <a:off x="4338218" y="1600200"/>
-            <a:ext cx="3515258" cy="2308860"/>
+            <a:off x="4338218" y="1783080"/>
+            <a:ext cx="3515258" cy="2103120"/>
           </a:xfrm>
           <a:prstGeom prst="roundRect">
             <a:avLst>
@@ -5657,12 +6090,10 @@
             </a:avLst>
           </a:prstGeom>
           <a:solidFill>
-            <a:srgbClr val="D2EFDC"/>
+            <a:srgbClr val="D5F6E0"/>
           </a:solidFill>
           <a:ln w="19050">
-            <a:solidFill>
-              <a:srgbClr val="29653D"/>
-            </a:solidFill>
+            <a:noFill/>
             <a:prstDash val="dash"/>
           </a:ln>
         </p:spPr>
@@ -5680,7 +6111,7 @@
             <a:r>
               <a:rPr sz="1200" b="0" i="0">
                 <a:solidFill>
-                  <a:srgbClr val="183A23"/>
+                  <a:srgbClr val="8E8780"/>
                 </a:solidFill>
               </a:rPr>
               <a:t>사진 2</a:t>
@@ -5690,14 +6121,14 @@
       </p:sp>
       <p:sp>
         <p:nvSpPr>
-          <p:cNvPr id="7" name="사진 자리"/>
+          <p:cNvPr id="9" name="사진 자리"/>
           <p:cNvSpPr/>
           <p:nvPr/>
         </p:nvSpPr>
         <p:spPr>
           <a:xfrm>
-            <a:off x="8036356" y="1600200"/>
-            <a:ext cx="3515258" cy="2308860"/>
+            <a:off x="8036356" y="1783080"/>
+            <a:ext cx="3515258" cy="2103120"/>
           </a:xfrm>
           <a:prstGeom prst="roundRect">
             <a:avLst>
@@ -5705,12 +6136,10 @@
             </a:avLst>
           </a:prstGeom>
           <a:solidFill>
-            <a:srgbClr val="D2EFDC"/>
+            <a:srgbClr val="D5F6E0"/>
           </a:solidFill>
           <a:ln w="19050">
-            <a:solidFill>
-              <a:srgbClr val="29653D"/>
-            </a:solidFill>
+            <a:noFill/>
             <a:prstDash val="dash"/>
           </a:ln>
         </p:spPr>
@@ -5728,7 +6157,7 @@
             <a:r>
               <a:rPr sz="1200" b="0" i="0">
                 <a:solidFill>
-                  <a:srgbClr val="183A23"/>
+                  <a:srgbClr val="8E8780"/>
                 </a:solidFill>
               </a:rPr>
               <a:t>사진 3</a:t>
@@ -5738,14 +6167,14 @@
       </p:sp>
       <p:sp>
         <p:nvSpPr>
-          <p:cNvPr id="8" name="사진 자리"/>
+          <p:cNvPr id="10" name="사진 자리"/>
           <p:cNvSpPr/>
           <p:nvPr/>
         </p:nvSpPr>
         <p:spPr>
           <a:xfrm>
-            <a:off x="640080" y="4091939"/>
-            <a:ext cx="3515258" cy="2308860"/>
+            <a:off x="640080" y="4069080"/>
+            <a:ext cx="3515258" cy="2103120"/>
           </a:xfrm>
           <a:prstGeom prst="roundRect">
             <a:avLst>
@@ -5753,12 +6182,10 @@
             </a:avLst>
           </a:prstGeom>
           <a:solidFill>
-            <a:srgbClr val="D2EFDC"/>
+            <a:srgbClr val="D5F6E0"/>
           </a:solidFill>
           <a:ln w="19050">
-            <a:solidFill>
-              <a:srgbClr val="29653D"/>
-            </a:solidFill>
+            <a:noFill/>
             <a:prstDash val="dash"/>
           </a:ln>
         </p:spPr>
@@ -5776,7 +6203,7 @@
             <a:r>
               <a:rPr sz="1200" b="0" i="0">
                 <a:solidFill>
-                  <a:srgbClr val="183A23"/>
+                  <a:srgbClr val="8E8780"/>
                 </a:solidFill>
               </a:rPr>
               <a:t>사진 4</a:t>
@@ -5786,14 +6213,14 @@
       </p:sp>
       <p:sp>
         <p:nvSpPr>
-          <p:cNvPr id="9" name="사진 자리"/>
+          <p:cNvPr id="11" name="사진 자리"/>
           <p:cNvSpPr/>
           <p:nvPr/>
         </p:nvSpPr>
         <p:spPr>
           <a:xfrm>
-            <a:off x="4338218" y="4091939"/>
-            <a:ext cx="3515258" cy="2308860"/>
+            <a:off x="4338218" y="4069080"/>
+            <a:ext cx="3515258" cy="2103120"/>
           </a:xfrm>
           <a:prstGeom prst="roundRect">
             <a:avLst>
@@ -5801,12 +6228,10 @@
             </a:avLst>
           </a:prstGeom>
           <a:solidFill>
-            <a:srgbClr val="D2EFDC"/>
+            <a:srgbClr val="D5F6E0"/>
           </a:solidFill>
           <a:ln w="19050">
-            <a:solidFill>
-              <a:srgbClr val="29653D"/>
-            </a:solidFill>
+            <a:noFill/>
             <a:prstDash val="dash"/>
           </a:ln>
         </p:spPr>
@@ -5824,7 +6249,7 @@
             <a:r>
               <a:rPr sz="1200" b="0" i="0">
                 <a:solidFill>
-                  <a:srgbClr val="183A23"/>
+                  <a:srgbClr val="8E8780"/>
                 </a:solidFill>
               </a:rPr>
               <a:t>사진 5</a:t>
@@ -5834,14 +6259,14 @@
       </p:sp>
       <p:sp>
         <p:nvSpPr>
-          <p:cNvPr id="10" name="사진 자리"/>
+          <p:cNvPr id="12" name="사진 자리"/>
           <p:cNvSpPr/>
           <p:nvPr/>
         </p:nvSpPr>
         <p:spPr>
           <a:xfrm>
-            <a:off x="8036356" y="4091939"/>
-            <a:ext cx="3515258" cy="2308860"/>
+            <a:off x="8036356" y="4069080"/>
+            <a:ext cx="3515258" cy="2103120"/>
           </a:xfrm>
           <a:prstGeom prst="roundRect">
             <a:avLst>
@@ -5849,12 +6274,10 @@
             </a:avLst>
           </a:prstGeom>
           <a:solidFill>
-            <a:srgbClr val="D2EFDC"/>
+            <a:srgbClr val="D5F6E0"/>
           </a:solidFill>
           <a:ln w="19050">
-            <a:solidFill>
-              <a:srgbClr val="29653D"/>
-            </a:solidFill>
+            <a:noFill/>
             <a:prstDash val="dash"/>
           </a:ln>
         </p:spPr>
@@ -5872,7 +6295,7 @@
             <a:r>
               <a:rPr sz="1200" b="0" i="0">
                 <a:solidFill>
-                  <a:srgbClr val="183A23"/>
+                  <a:srgbClr val="8E8780"/>
                 </a:solidFill>
               </a:rPr>
               <a:t>사진 6</a:t>
@@ -5891,6 +6314,14 @@
 <file path=ppt/slides/slide6.xml><?xml version="1.0" encoding="utf-8"?>
 <p:sld xmlns:a="http://schemas.openxmlformats.org/drawingml/2006/main" xmlns:p="http://schemas.openxmlformats.org/presentationml/2006/main" xmlns:r="http://schemas.openxmlformats.org/officeDocument/2006/relationships">
   <p:cSld>
+    <p:bg>
+      <p:bgPr>
+        <a:solidFill>
+          <a:srgbClr val="D5F6E0"/>
+        </a:solidFill>
+        <a:effectLst/>
+      </p:bgPr>
+    </p:bg>
     <p:spTree>
       <p:nvGrpSpPr>
         <p:cNvPr id="1" name=""/>
@@ -5898,30 +6329,116 @@
         <p:nvPr/>
       </p:nvGrpSpPr>
       <p:grpSpPr/>
-      <p:pic>
-        <p:nvPicPr>
-          <p:cNvPr id="3" name="표지 그림" descr="family-47.jpg"/>
-          <p:cNvPicPr>
-            <a:picLocks noChangeAspect="1"/>
-          </p:cNvPicPr>
-          <p:nvPr/>
-        </p:nvPicPr>
-        <p:blipFill>
-          <a:blip r:embed="rId2"/>
-          <a:stretch>
-            <a:fillRect/>
-          </a:stretch>
-        </p:blipFill>
-        <p:spPr>
-          <a:xfrm>
-            <a:off x="0" y="0"/>
-            <a:ext cx="12191695" cy="6858000"/>
+      <p:sp>
+        <p:nvSpPr>
+          <p:cNvPr id="3" name="사진 자리"/>
+          <p:cNvSpPr/>
+          <p:nvPr/>
+        </p:nvSpPr>
+        <p:spPr>
+          <a:xfrm>
+            <a:off x="7802684" y="0"/>
+            <a:ext cx="4389010" cy="6858000"/>
           </a:xfrm>
           <a:prstGeom prst="rect">
             <a:avLst/>
           </a:prstGeom>
-        </p:spPr>
-      </p:pic>
+          <a:solidFill>
+            <a:srgbClr val="ADEBC2"/>
+          </a:solidFill>
+          <a:ln>
+            <a:noFill/>
+          </a:ln>
+        </p:spPr>
+        <p:txBody>
+          <a:bodyPr rtlCol="0" anchor="ctr" wrap="square" lIns="54864" rIns="54864" tIns="27432" bIns="27432">
+            <a:noAutofit/>
+          </a:bodyPr>
+          <a:lstStyle/>
+          <a:p>
+            <a:pPr algn="ctr">
+              <a:lnSpc>
+                <a:spcPct val="100000"/>
+              </a:lnSpc>
+            </a:pPr>
+            <a:r>
+              <a:rPr sz="1400" b="0" i="0">
+                <a:solidFill>
+                  <a:srgbClr val="274932"/>
+                </a:solidFill>
+              </a:rPr>
+              <a:t>사진을 넣어 주세요</a:t>
+            </a:r>
+          </a:p>
+        </p:txBody>
+      </p:sp>
+      <p:sp>
+        <p:nvSpPr>
+          <p:cNvPr id="4" name="장식"/>
+          <p:cNvSpPr/>
+          <p:nvPr/>
+        </p:nvSpPr>
+        <p:spPr>
+          <a:xfrm>
+            <a:off x="8168435" y="365760"/>
+            <a:ext cx="3657508" cy="6126480"/>
+          </a:xfrm>
+          <a:prstGeom prst="rect">
+            <a:avLst/>
+          </a:prstGeom>
+          <a:noFill/>
+          <a:ln w="9525">
+            <a:solidFill>
+              <a:srgbClr val="26231F"/>
+            </a:solidFill>
+          </a:ln>
+        </p:spPr>
+        <p:txBody>
+          <a:bodyPr rtlCol="0" anchor="ctr"/>
+          <a:lstStyle/>
+          <a:p>
+            <a:pPr algn="ctr"/>
+          </a:p>
+        </p:txBody>
+      </p:sp>
+      <p:sp>
+        <p:nvSpPr>
+          <p:cNvPr id="5" name="라벨"/>
+          <p:cNvSpPr txBox="1"/>
+          <p:nvPr/>
+        </p:nvSpPr>
+        <p:spPr>
+          <a:xfrm>
+            <a:off x="822960" y="2148840"/>
+            <a:ext cx="5608179" cy="274320"/>
+          </a:xfrm>
+          <a:prstGeom prst="rect">
+            <a:avLst/>
+          </a:prstGeom>
+          <a:noFill/>
+        </p:spPr>
+        <p:txBody>
+          <a:bodyPr wrap="square" lIns="54864" rIns="54864" tIns="27432" bIns="27432" anchor="t">
+            <a:noAutofit/>
+          </a:bodyPr>
+          <a:lstStyle/>
+          <a:p>
+            <a:pPr algn="l">
+              <a:lnSpc>
+                <a:spcPct val="115000"/>
+              </a:lnSpc>
+            </a:pPr>
+            <a:r>
+              <a:rPr sz="1000" b="1" i="0" spc="250">
+                <a:solidFill>
+                  <a:srgbClr val="26231F"/>
+                </a:solidFill>
+              </a:rPr>
+              <a:t>FAMILY ALBUM</a:t>
+            </a:r>
+          </a:p>
+        </p:txBody>
+      </p:sp>
       <p:sp>
         <p:nvSpPr>
           <p:cNvPr id="2" name="Title 1"/>
@@ -5934,8 +6451,8 @@
         </p:nvSpPr>
         <p:spPr>
           <a:xfrm>
-            <a:off x="853418" y="2057400"/>
-            <a:ext cx="6095847" cy="1554480"/>
+            <a:off x="822960" y="2606040"/>
+            <a:ext cx="5608179" cy="1188720"/>
           </a:xfrm>
         </p:spPr>
         <p:txBody>
@@ -5950,9 +6467,9 @@
               </a:lnSpc>
             </a:pPr>
             <a:r>
-              <a:rPr sz="3600" b="1" i="0">
-                <a:solidFill>
-                  <a:srgbClr val="183A23"/>
+              <a:rPr sz="4000" b="1" i="0">
+                <a:solidFill>
+                  <a:srgbClr val="26231F"/>
                 </a:solidFill>
               </a:rPr>
               <a:t>우리 가족 소개를 마칩니다</a:t>
@@ -5962,14 +6479,14 @@
       </p:sp>
       <p:sp>
         <p:nvSpPr>
-          <p:cNvPr id="4" name="한 줄 문구"/>
+          <p:cNvPr id="6" name="한 줄 문구"/>
           <p:cNvSpPr txBox="1"/>
           <p:nvPr/>
         </p:nvSpPr>
         <p:spPr>
           <a:xfrm>
-            <a:off x="853418" y="3749039"/>
-            <a:ext cx="6095847" cy="822960"/>
+            <a:off x="822960" y="3886200"/>
+            <a:ext cx="5608179" cy="822960"/>
           </a:xfrm>
           <a:prstGeom prst="rect">
             <a:avLst/>
@@ -5988,9 +6505,9 @@
               </a:lnSpc>
             </a:pPr>
             <a:r>
-              <a:rPr sz="1700" b="0" i="1">
-                <a:solidFill>
-                  <a:srgbClr val="183A23"/>
+              <a:rPr sz="1700" b="0" i="0">
+                <a:solidFill>
+                  <a:srgbClr val="26231F"/>
                 </a:solidFill>
               </a:rPr>
               <a:t>읽어 주셔서 고맙습니다</a:t>
@@ -6000,14 +6517,14 @@
       </p:sp>
       <p:sp>
         <p:nvSpPr>
-          <p:cNvPr id="5" name="안내 문구"/>
+          <p:cNvPr id="7" name="안내 문구"/>
           <p:cNvSpPr txBox="1"/>
           <p:nvPr/>
         </p:nvSpPr>
         <p:spPr>
           <a:xfrm>
-            <a:off x="853418" y="4617720"/>
-            <a:ext cx="6095847" cy="914400"/>
+            <a:off x="822960" y="4754880"/>
+            <a:ext cx="5608179" cy="914400"/>
           </a:xfrm>
           <a:prstGeom prst="rect">
             <a:avLst/>
@@ -6028,7 +6545,7 @@
             <a:r>
               <a:rPr sz="1400" b="0" i="0">
                 <a:solidFill>
-                  <a:srgbClr val="666666"/>
+                  <a:srgbClr val="26231F"/>
                 </a:solidFill>
               </a:rPr>
               <a:t>고맙습니다 · 가족 이름</a:t>
@@ -6055,34 +6572,34 @@
         <a:sysClr val="window" lastClr="FFFFFF"/>
       </a:lt1>
       <a:dk2>
-        <a:srgbClr val="183A23"/>
+        <a:srgbClr val="274932"/>
       </a:dk2>
       <a:lt2>
-        <a:srgbClr val="F1F9F3"/>
+        <a:srgbClr val="ECFBF1"/>
       </a:lt2>
       <a:accent1>
-        <a:srgbClr val="29653D"/>
+        <a:srgbClr val="98E1B1"/>
       </a:accent1>
       <a:accent2>
-        <a:srgbClr val="833B91"/>
+        <a:srgbClr val="B8EAE0"/>
       </a:accent2>
       <a:accent3>
-        <a:srgbClr val="183A23"/>
+        <a:srgbClr val="274932"/>
       </a:accent3>
       <a:accent4>
-        <a:srgbClr val="D2EFDC"/>
+        <a:srgbClr val="D5F6E0"/>
       </a:accent4>
       <a:accent5>
-        <a:srgbClr val="565067"/>
+        <a:srgbClr val="A8E6C8"/>
       </a:accent5>
       <a:accent6>
-        <a:srgbClr val="74897B"/>
+        <a:srgbClr val="7D9284"/>
       </a:accent6>
       <a:hlink>
-        <a:srgbClr val="29653D"/>
+        <a:srgbClr val="98E1B1"/>
       </a:hlink>
       <a:folHlink>
-        <a:srgbClr val="183A23"/>
+        <a:srgbClr val="274932"/>
       </a:folHlink>
     </a:clrScheme>
     <a:fontScheme name="Office">
